--- a/submission/Glass_Box_AI-Submission-Deck.pptx
+++ b/submission/Glass_Box_AI-Submission-Deck.pptx
@@ -4505,7 +4505,7 @@
                           </a:solidFill>
                           <a:latin typeface="Arial"/>
                         </a:rPr>
-                        <a:t>Auto insurance claims are slow, manual, and opaque - customers wait weeks and never learn why a decision was made. The challenge: process claims end-to-end with AI agents, fast and at scale, with every decision explainable and auditable.</a:t>
+                        <a:t>Insurance claims are slow, manual, and opaque. Build an agentic AI system that processes auto claims end-to-end - fast, accurate, and fully explainable.</a:t>
                       </a:r>
                       <a:endParaRPr lang="en-US" sz="1100" i="0" dirty="0">
                         <a:latin typeface="Arial" charset="0"/>
